--- a/gitStarted/notes/Git_Tutorial_Banking_Remediation.pptx
+++ b/gitStarted/notes/Git_Tutorial_Banking_Remediation.pptx
@@ -535,37 +535,6 @@
           <a:bodyPr/>
           <a:lstStyle/>
           <a:p>
-            <a:pPr marL="0" marR="0" lvl="0" indent="0" algn="l" defTabSz="914400" rtl="0" eaLnBrk="1" fontAlgn="auto" latinLnBrk="0" hangingPunct="1">
-              <a:lnSpc>
-                <a:spcPct val="100000"/>
-              </a:lnSpc>
-              <a:spcBef>
-                <a:spcPts val="0"/>
-              </a:spcBef>
-              <a:spcAft>
-                <a:spcPts val="0"/>
-              </a:spcAft>
-              <a:buClrTx/>
-              <a:buSzTx/>
-              <a:buFontTx/>
-              <a:buNone/>
-              <a:tabLst/>
-              <a:defRPr/>
-            </a:pPr>
-            <a:r>
-              <a:rPr lang="en-US" dirty="0"/>
-              <a:t>Welcome everyone! Today we’re diving into Git, a tool that helps us track changes, collaborate with others, and ensure traceability in our work. This session is tailored for business analysts working in banking remediation, with tools you're familiar with: </a:t>
-            </a:r>
-            <a:r>
-              <a:rPr lang="en-US" dirty="0" err="1"/>
-              <a:t>VSCode</a:t>
-            </a:r>
-            <a:r>
-              <a:rPr lang="en-US" dirty="0"/>
-              <a:t> and the command line.</a:t>
-            </a:r>
-          </a:p>
-          <a:p>
             <a:endParaRPr lang="en-PH" dirty="0"/>
           </a:p>
         </p:txBody>
@@ -650,51 +619,6 @@
           <a:bodyPr/>
           <a:lstStyle/>
           <a:p>
-            <a:pPr>
-              <a:buNone/>
-            </a:pPr>
-            <a:r>
-              <a:rPr lang="en-US" dirty="0"/>
-              <a:t>Accidentally added something? Reset or restore it."</a:t>
-            </a:r>
-          </a:p>
-          <a:p>
-            <a:r>
-              <a:rPr lang="en-US" dirty="0"/>
-              <a:t>git restore filename # or git reset --soft HEAD~1</a:t>
-            </a:r>
-          </a:p>
-          <a:p>
-            <a:endParaRPr lang="en-PH" dirty="0"/>
-          </a:p>
-          <a:p>
-            <a:pPr marL="0" marR="0" lvl="0" indent="0" algn="l" defTabSz="914400" rtl="0" eaLnBrk="1" fontAlgn="auto" latinLnBrk="0" hangingPunct="1">
-              <a:lnSpc>
-                <a:spcPct val="100000"/>
-              </a:lnSpc>
-              <a:spcBef>
-                <a:spcPts val="0"/>
-              </a:spcBef>
-              <a:spcAft>
-                <a:spcPts val="0"/>
-              </a:spcAft>
-              <a:buClrTx/>
-              <a:buSzTx/>
-              <a:buFontTx/>
-              <a:buNone/>
-              <a:tabLst/>
-              <a:defRPr/>
-            </a:pPr>
-            <a:r>
-              <a:rPr lang="en-US" b="1" dirty="0"/>
-              <a:t>Explanation:</a:t>
-            </a:r>
-            <a:r>
-              <a:rPr lang="en-US" dirty="0"/>
-              <a:t> Restore reverts file changes. Reset undoes the last commit.</a:t>
-            </a:r>
-          </a:p>
-          <a:p>
             <a:endParaRPr lang="en-PH" dirty="0"/>
           </a:p>
         </p:txBody>
@@ -796,76 +720,6 @@
               <a:tabLst/>
               <a:defRPr/>
             </a:pPr>
-            <a:r>
-              <a:rPr lang="en-US" dirty="0"/>
-              <a:t>Want to see what changed and when?</a:t>
-            </a:r>
-          </a:p>
-          <a:p>
-            <a:pPr marL="0" marR="0" lvl="0" indent="0" algn="l" defTabSz="914400" rtl="0" eaLnBrk="1" fontAlgn="auto" latinLnBrk="0" hangingPunct="1">
-              <a:lnSpc>
-                <a:spcPct val="100000"/>
-              </a:lnSpc>
-              <a:spcBef>
-                <a:spcPts val="0"/>
-              </a:spcBef>
-              <a:spcAft>
-                <a:spcPts val="0"/>
-              </a:spcAft>
-              <a:buClrTx/>
-              <a:buSzTx/>
-              <a:buFontTx/>
-              <a:buNone/>
-              <a:tabLst/>
-              <a:defRPr/>
-            </a:pPr>
-            <a:endParaRPr lang="en-US" dirty="0"/>
-          </a:p>
-          <a:p>
-            <a:pPr marL="0" marR="0" lvl="0" indent="0" algn="l" defTabSz="914400" rtl="0" eaLnBrk="1" fontAlgn="auto" latinLnBrk="0" hangingPunct="1">
-              <a:lnSpc>
-                <a:spcPct val="100000"/>
-              </a:lnSpc>
-              <a:spcBef>
-                <a:spcPts val="0"/>
-              </a:spcBef>
-              <a:spcAft>
-                <a:spcPts val="0"/>
-              </a:spcAft>
-              <a:buClrTx/>
-              <a:buSzTx/>
-              <a:buFontTx/>
-              <a:buNone/>
-              <a:tabLst/>
-              <a:defRPr/>
-            </a:pPr>
-            <a:r>
-              <a:rPr lang="en-US" b="1" dirty="0"/>
-              <a:t>Explanation:</a:t>
-            </a:r>
-            <a:r>
-              <a:rPr lang="en-US" dirty="0"/>
-              <a:t> Shows the commit history.</a:t>
-            </a:r>
-          </a:p>
-          <a:p>
-            <a:pPr marL="0" marR="0" lvl="0" indent="0" algn="l" defTabSz="914400" rtl="0" eaLnBrk="1" fontAlgn="auto" latinLnBrk="0" hangingPunct="1">
-              <a:lnSpc>
-                <a:spcPct val="100000"/>
-              </a:lnSpc>
-              <a:spcBef>
-                <a:spcPts val="0"/>
-              </a:spcBef>
-              <a:spcAft>
-                <a:spcPts val="0"/>
-              </a:spcAft>
-              <a:buClrTx/>
-              <a:buSzTx/>
-              <a:buFontTx/>
-              <a:buNone/>
-              <a:tabLst/>
-              <a:defRPr/>
-            </a:pPr>
             <a:endParaRPr lang="en-US" dirty="0"/>
           </a:p>
         </p:txBody>
@@ -1118,67 +972,6 @@
           <a:bodyPr/>
           <a:lstStyle/>
           <a:p>
-            <a:pPr>
-              <a:buFont typeface="Arial" panose="020B0604020202020204" pitchFamily="34" charset="0"/>
-              <a:buChar char="•"/>
-            </a:pPr>
-            <a:r>
-              <a:rPr lang="en-US" b="1" dirty="0"/>
-              <a:t>How to check branches?</a:t>
-            </a:r>
-            <a:r>
-              <a:rPr lang="en-US" dirty="0"/>
-              <a:t> git branch, git branch -r, git branch -a</a:t>
-            </a:r>
-          </a:p>
-          <a:p>
-            <a:pPr>
-              <a:buFont typeface="Arial" panose="020B0604020202020204" pitchFamily="34" charset="0"/>
-              <a:buChar char="•"/>
-            </a:pPr>
-            <a:r>
-              <a:rPr lang="en-US" b="1" dirty="0"/>
-              <a:t>What is amend?</a:t>
-            </a:r>
-            <a:r>
-              <a:rPr lang="en-US" dirty="0"/>
-              <a:t> git commit --amend lets you fix the last commit.</a:t>
-            </a:r>
-          </a:p>
-          <a:p>
-            <a:pPr>
-              <a:buFont typeface="Arial" panose="020B0604020202020204" pitchFamily="34" charset="0"/>
-              <a:buChar char="•"/>
-            </a:pPr>
-            <a:r>
-              <a:rPr lang="en-US" b="1" dirty="0"/>
-              <a:t>What’s .</a:t>
-            </a:r>
-            <a:r>
-              <a:rPr lang="en-US" b="1" dirty="0" err="1"/>
-              <a:t>gitignore</a:t>
-            </a:r>
-            <a:r>
-              <a:rPr lang="en-US" b="1" dirty="0"/>
-              <a:t>?</a:t>
-            </a:r>
-            <a:r>
-              <a:rPr lang="en-US" dirty="0"/>
-              <a:t> File to exclude things like .</a:t>
-            </a:r>
-            <a:r>
-              <a:rPr lang="en-US" dirty="0" err="1"/>
-              <a:t>DS_Store</a:t>
-            </a:r>
-            <a:r>
-              <a:rPr lang="en-US" dirty="0"/>
-              <a:t>, *.log, temp/</a:t>
-            </a:r>
-          </a:p>
-          <a:p>
-            <a:endParaRPr lang="en-PH" dirty="0"/>
-          </a:p>
-          <a:p>
             <a:endParaRPr lang="en-PH" dirty="0"/>
           </a:p>
         </p:txBody>
@@ -1263,28 +1056,89 @@
           <a:bodyPr/>
           <a:lstStyle/>
           <a:p>
-            <a:pPr marL="0" marR="0" lvl="0" indent="0" algn="l" defTabSz="914400" rtl="0" eaLnBrk="1" fontAlgn="auto" latinLnBrk="0" hangingPunct="1">
-              <a:lnSpc>
-                <a:spcPct val="100000"/>
-              </a:lnSpc>
-              <a:spcBef>
-                <a:spcPts val="0"/>
-              </a:spcBef>
-              <a:spcAft>
-                <a:spcPts val="0"/>
-              </a:spcAft>
-              <a:buClrTx/>
-              <a:buSzTx/>
-              <a:buFontTx/>
-              <a:buNone/>
-              <a:tabLst/>
-              <a:defRPr/>
-            </a:pPr>
-            <a:r>
-              <a:rPr lang="en-US" dirty="0"/>
-              <a:t>To recap: you clone, create or edit files, commit locally, and push to GitHub. You work in branches to stay safe. Always pull before pushing, and use clear messages."</a:t>
-            </a:r>
-          </a:p>
+            <a:endParaRPr lang="en-PH" dirty="0"/>
+          </a:p>
+        </p:txBody>
+      </p:sp>
+      <p:sp>
+        <p:nvSpPr>
+          <p:cNvPr id="4" name="Slide Number Placeholder 3"/>
+          <p:cNvSpPr>
+            <a:spLocks noGrp="1"/>
+          </p:cNvSpPr>
+          <p:nvPr>
+            <p:ph type="sldNum" sz="quarter" idx="5"/>
+          </p:nvPr>
+        </p:nvSpPr>
+        <p:spPr/>
+        <p:txBody>
+          <a:bodyPr/>
+          <a:lstStyle/>
+          <a:p>
+            <a:fld id="{AA6290D1-6140-49A7-820A-52936A3EF0C8}" type="slidenum">
+              <a:rPr lang="en-PH" smtClean="0"/>
+              <a:t>15</a:t>
+            </a:fld>
+            <a:endParaRPr lang="en-PH"/>
+          </a:p>
+        </p:txBody>
+      </p:sp>
+    </p:spTree>
+    <p:extLst>
+      <p:ext uri="{BB962C8B-B14F-4D97-AF65-F5344CB8AC3E}">
+        <p14:creationId xmlns:p14="http://schemas.microsoft.com/office/powerpoint/2010/main" val="1066474750"/>
+      </p:ext>
+    </p:extLst>
+  </p:cSld>
+  <p:clrMapOvr>
+    <a:masterClrMapping/>
+  </p:clrMapOvr>
+</p:notes>
+</file>
+
+<file path=ppt/notesSlides/notesSlide16.xml><?xml version="1.0" encoding="utf-8"?>
+<p:notes xmlns:a="http://schemas.openxmlformats.org/drawingml/2006/main" xmlns:r="http://schemas.openxmlformats.org/officeDocument/2006/relationships" xmlns:p="http://schemas.openxmlformats.org/presentationml/2006/main">
+  <p:cSld>
+    <p:spTree>
+      <p:nvGrpSpPr>
+        <p:cNvPr id="1" name=""/>
+        <p:cNvGrpSpPr/>
+        <p:nvPr/>
+      </p:nvGrpSpPr>
+      <p:grpSpPr>
+        <a:xfrm>
+          <a:off x="0" y="0"/>
+          <a:ext cx="0" cy="0"/>
+          <a:chOff x="0" y="0"/>
+          <a:chExt cx="0" cy="0"/>
+        </a:xfrm>
+      </p:grpSpPr>
+      <p:sp>
+        <p:nvSpPr>
+          <p:cNvPr id="2" name="Slide Image Placeholder 1"/>
+          <p:cNvSpPr>
+            <a:spLocks noGrp="1" noRot="1" noChangeAspect="1"/>
+          </p:cNvSpPr>
+          <p:nvPr>
+            <p:ph type="sldImg"/>
+          </p:nvPr>
+        </p:nvSpPr>
+        <p:spPr/>
+      </p:sp>
+      <p:sp>
+        <p:nvSpPr>
+          <p:cNvPr id="3" name="Notes Placeholder 2"/>
+          <p:cNvSpPr>
+            <a:spLocks noGrp="1"/>
+          </p:cNvSpPr>
+          <p:nvPr>
+            <p:ph type="body" idx="1"/>
+          </p:nvPr>
+        </p:nvSpPr>
+        <p:spPr/>
+        <p:txBody>
+          <a:bodyPr/>
+          <a:lstStyle/>
           <a:p>
             <a:endParaRPr lang="en-PH" dirty="0"/>
           </a:p>
@@ -1370,226 +1224,6 @@
           <a:bodyPr/>
           <a:lstStyle/>
           <a:p>
-            <a:pPr marL="0" marR="0" lvl="0" indent="0" algn="l" defTabSz="914400" rtl="0" eaLnBrk="1" fontAlgn="auto" latinLnBrk="0" hangingPunct="1">
-              <a:lnSpc>
-                <a:spcPct val="100000"/>
-              </a:lnSpc>
-              <a:spcBef>
-                <a:spcPts val="0"/>
-              </a:spcBef>
-              <a:spcAft>
-                <a:spcPts val="0"/>
-              </a:spcAft>
-              <a:buClrTx/>
-              <a:buSzTx/>
-              <a:buFontTx/>
-              <a:buNone/>
-              <a:tabLst/>
-              <a:defRPr/>
-            </a:pPr>
-            <a:r>
-              <a:rPr lang="en-US" dirty="0"/>
-              <a:t>Let’s start with why we use Git. Git helps track the versions of your SQL scripts, documentation, Excel-based findings—even if you're not writing code. It helps in understanding what changed, when, and by whom. In remediation work, audit trails are essential. Git gives you that, and more.</a:t>
-            </a:r>
-          </a:p>
-          <a:p>
-            <a:endParaRPr lang="en-PH" dirty="0"/>
-          </a:p>
-          <a:p>
-            <a:pPr>
-              <a:buNone/>
-            </a:pPr>
-            <a:r>
-              <a:rPr lang="en-US" b="1" dirty="0"/>
-              <a:t>Git is Like a “Version-Controlled Filing Cabinet”</a:t>
-            </a:r>
-          </a:p>
-          <a:p>
-            <a:pPr>
-              <a:buNone/>
-            </a:pPr>
-            <a:r>
-              <a:rPr lang="en-US" b="1" dirty="0"/>
-              <a:t>Imagine your remediation project is a shared filing cabinet.</a:t>
-            </a:r>
-            <a:endParaRPr lang="en-US" dirty="0"/>
-          </a:p>
-          <a:p>
-            <a:pPr>
-              <a:buFont typeface="Arial" panose="020B0604020202020204" pitchFamily="34" charset="0"/>
-              <a:buChar char="•"/>
-            </a:pPr>
-            <a:r>
-              <a:rPr lang="en-US" dirty="0"/>
-              <a:t>Every analyst works on reports (documents, SQL scripts, spreadsheets).</a:t>
-            </a:r>
-          </a:p>
-          <a:p>
-            <a:pPr>
-              <a:buFont typeface="Arial" panose="020B0604020202020204" pitchFamily="34" charset="0"/>
-              <a:buChar char="•"/>
-            </a:pPr>
-            <a:r>
-              <a:rPr lang="en-US" dirty="0"/>
-              <a:t>Without Git, people overwrite each other's files or keep 10 versions like:</a:t>
-            </a:r>
-          </a:p>
-          <a:p>
-            <a:pPr>
-              <a:buFont typeface="Arial" panose="020B0604020202020204" pitchFamily="34" charset="0"/>
-              <a:buChar char="•"/>
-            </a:pPr>
-            <a:r>
-              <a:rPr lang="en-US" dirty="0" err="1"/>
-              <a:t>CopyEdit</a:t>
-            </a:r>
-            <a:endParaRPr lang="en-US" dirty="0"/>
-          </a:p>
-          <a:p>
-            <a:pPr rtl="0">
-              <a:buFont typeface="Arial" panose="020B0604020202020204" pitchFamily="34" charset="0"/>
-              <a:buChar char="•"/>
-            </a:pPr>
-            <a:r>
-              <a:rPr lang="en-US" dirty="0"/>
-              <a:t>final_report_v2_final_FINAL_reviewed_UPDATED.docx </a:t>
-            </a:r>
-          </a:p>
-          <a:p>
-            <a:pPr>
-              <a:buNone/>
-            </a:pPr>
-            <a:r>
-              <a:rPr lang="en-US" b="1" dirty="0"/>
-              <a:t>🔄 Now enter Git — your smart filing system:</a:t>
-            </a:r>
-          </a:p>
-          <a:p>
-            <a:pPr>
-              <a:buFont typeface="Arial" panose="020B0604020202020204" pitchFamily="34" charset="0"/>
-              <a:buChar char="•"/>
-            </a:pPr>
-            <a:r>
-              <a:rPr lang="en-US" dirty="0"/>
-              <a:t>Every time you update a file, Git remembers exactly </a:t>
-            </a:r>
-            <a:r>
-              <a:rPr lang="en-US" b="1" dirty="0"/>
-              <a:t>what changed</a:t>
-            </a:r>
-            <a:r>
-              <a:rPr lang="en-US" dirty="0"/>
-              <a:t>, </a:t>
-            </a:r>
-            <a:r>
-              <a:rPr lang="en-US" b="1" dirty="0"/>
-              <a:t>who changed it</a:t>
-            </a:r>
-            <a:r>
-              <a:rPr lang="en-US" dirty="0"/>
-              <a:t>, and </a:t>
-            </a:r>
-            <a:r>
-              <a:rPr lang="en-US" b="1" dirty="0"/>
-              <a:t>when</a:t>
-            </a:r>
-            <a:r>
-              <a:rPr lang="en-US" dirty="0"/>
-              <a:t>.</a:t>
-            </a:r>
-          </a:p>
-          <a:p>
-            <a:pPr>
-              <a:buFont typeface="Arial" panose="020B0604020202020204" pitchFamily="34" charset="0"/>
-              <a:buChar char="•"/>
-            </a:pPr>
-            <a:r>
-              <a:rPr lang="en-US" dirty="0"/>
-              <a:t>You can </a:t>
-            </a:r>
-            <a:r>
-              <a:rPr lang="en-US" b="1" dirty="0"/>
-              <a:t>roll back</a:t>
-            </a:r>
-            <a:r>
-              <a:rPr lang="en-US" dirty="0"/>
-              <a:t> to earlier versions if someone makes a mistake.</a:t>
-            </a:r>
-          </a:p>
-          <a:p>
-            <a:pPr>
-              <a:buFont typeface="Arial" panose="020B0604020202020204" pitchFamily="34" charset="0"/>
-              <a:buChar char="•"/>
-            </a:pPr>
-            <a:r>
-              <a:rPr lang="en-US" dirty="0"/>
-              <a:t>You can </a:t>
-            </a:r>
-            <a:r>
-              <a:rPr lang="en-US" b="1" dirty="0"/>
-              <a:t>branch off</a:t>
-            </a:r>
-            <a:r>
-              <a:rPr lang="en-US" dirty="0"/>
-              <a:t> and work on new ideas (like testing new risk logic) without disturbing the main project.</a:t>
-            </a:r>
-          </a:p>
-          <a:p>
-            <a:pPr>
-              <a:buFont typeface="Arial" panose="020B0604020202020204" pitchFamily="34" charset="0"/>
-              <a:buChar char="•"/>
-            </a:pPr>
-            <a:r>
-              <a:rPr lang="en-US" dirty="0"/>
-              <a:t>You can </a:t>
-            </a:r>
-            <a:r>
-              <a:rPr lang="en-US" b="1" dirty="0"/>
-              <a:t>merge changes</a:t>
-            </a:r>
-            <a:r>
-              <a:rPr lang="en-US" dirty="0"/>
-              <a:t> only after review and agreement — like controlled approvals.</a:t>
-            </a:r>
-          </a:p>
-          <a:p>
-            <a:pPr>
-              <a:buNone/>
-            </a:pPr>
-            <a:r>
-              <a:rPr lang="en-US" b="1" dirty="0"/>
-              <a:t>📤 GitHub is like the cloud filing cabinet:</a:t>
-            </a:r>
-          </a:p>
-          <a:p>
-            <a:pPr>
-              <a:buFont typeface="Arial" panose="020B0604020202020204" pitchFamily="34" charset="0"/>
-              <a:buChar char="•"/>
-            </a:pPr>
-            <a:r>
-              <a:rPr lang="en-US" dirty="0"/>
-              <a:t>Everyone syncs their local changes back to a </a:t>
-            </a:r>
-            <a:r>
-              <a:rPr lang="en-US" b="1" dirty="0"/>
-              <a:t>shared remote folder</a:t>
-            </a:r>
-            <a:r>
-              <a:rPr lang="en-US" dirty="0"/>
-              <a:t> (the GitHub repo).</a:t>
-            </a:r>
-          </a:p>
-          <a:p>
-            <a:pPr>
-              <a:buFont typeface="Arial" panose="020B0604020202020204" pitchFamily="34" charset="0"/>
-              <a:buChar char="•"/>
-            </a:pPr>
-            <a:r>
-              <a:rPr lang="en-US" dirty="0"/>
-              <a:t>It ensures the team is always working with the latest reviewed version.</a:t>
-            </a:r>
-          </a:p>
-          <a:p>
             <a:endParaRPr lang="en-PH" dirty="0"/>
           </a:p>
         </p:txBody>
@@ -1674,55 +1308,6 @@
           <a:bodyPr/>
           <a:lstStyle/>
           <a:p>
-            <a:pPr marL="0" marR="0" lvl="0" indent="0" algn="l" defTabSz="914400" rtl="0" eaLnBrk="1" fontAlgn="auto" latinLnBrk="0" hangingPunct="1">
-              <a:lnSpc>
-                <a:spcPct val="100000"/>
-              </a:lnSpc>
-              <a:spcBef>
-                <a:spcPts val="0"/>
-              </a:spcBef>
-              <a:spcAft>
-                <a:spcPts val="0"/>
-              </a:spcAft>
-              <a:buClrTx/>
-              <a:buSzTx/>
-              <a:buFontTx/>
-              <a:buNone/>
-              <a:tabLst/>
-              <a:defRPr/>
-            </a:pPr>
-            <a:r>
-              <a:rPr lang="en-US" dirty="0"/>
-              <a:t>"Instead of creating files from scratch, we clone an existing project from GitHub. This gives us the full working directory locally."</a:t>
-            </a:r>
-          </a:p>
-          <a:p>
-            <a:endParaRPr lang="en-PH" dirty="0"/>
-          </a:p>
-          <a:p>
-            <a:pPr marL="0" marR="0" lvl="0" indent="0" algn="l" defTabSz="914400" rtl="0" eaLnBrk="1" fontAlgn="auto" latinLnBrk="0" hangingPunct="1">
-              <a:lnSpc>
-                <a:spcPct val="100000"/>
-              </a:lnSpc>
-              <a:spcBef>
-                <a:spcPts val="0"/>
-              </a:spcBef>
-              <a:spcAft>
-                <a:spcPts val="0"/>
-              </a:spcAft>
-              <a:buClrTx/>
-              <a:buSzTx/>
-              <a:buFontTx/>
-              <a:buNone/>
-              <a:tabLst/>
-              <a:defRPr/>
-            </a:pPr>
-            <a:r>
-              <a:rPr lang="en-US" dirty="0"/>
-              <a:t>git clone downloads a remote repo; cd moves into that folder.</a:t>
-            </a:r>
-          </a:p>
-          <a:p>
             <a:endParaRPr lang="en-PH" dirty="0"/>
           </a:p>
         </p:txBody>
@@ -1807,29 +1392,6 @@
           <a:bodyPr/>
           <a:lstStyle/>
           <a:p>
-            <a:pPr marL="0" marR="0" lvl="0" indent="0" algn="l" defTabSz="914400" rtl="0" eaLnBrk="1" fontAlgn="auto" latinLnBrk="0" hangingPunct="1">
-              <a:lnSpc>
-                <a:spcPct val="100000"/>
-              </a:lnSpc>
-              <a:spcBef>
-                <a:spcPts val="0"/>
-              </a:spcBef>
-              <a:spcAft>
-                <a:spcPts val="0"/>
-              </a:spcAft>
-              <a:buClrTx/>
-              <a:buSzTx/>
-              <a:buFontTx/>
-              <a:buNone/>
-              <a:tabLst/>
-              <a:defRPr/>
-            </a:pPr>
-            <a:r>
-              <a:rPr lang="en-US" dirty="0"/>
-              <a:t>Think of Git in two layers. Local is your workspace—where you make changes and commits. Remote (GitHub) is where you sync those changes with your team. Git lets you work offline, then push when ready.</a:t>
-            </a:r>
-          </a:p>
-          <a:p>
             <a:endParaRPr lang="en-PH" dirty="0"/>
           </a:p>
         </p:txBody>
@@ -1914,55 +1476,6 @@
           <a:bodyPr/>
           <a:lstStyle/>
           <a:p>
-            <a:pPr marL="0" marR="0" lvl="0" indent="0" algn="l" defTabSz="914400" rtl="0" eaLnBrk="1" fontAlgn="auto" latinLnBrk="0" hangingPunct="1">
-              <a:lnSpc>
-                <a:spcPct val="100000"/>
-              </a:lnSpc>
-              <a:spcBef>
-                <a:spcPts val="0"/>
-              </a:spcBef>
-              <a:spcAft>
-                <a:spcPts val="0"/>
-              </a:spcAft>
-              <a:buClrTx/>
-              <a:buSzTx/>
-              <a:buFontTx/>
-              <a:buNone/>
-              <a:tabLst/>
-              <a:defRPr/>
-            </a:pPr>
-            <a:r>
-              <a:rPr lang="en-US" dirty="0"/>
-              <a:t>"Let’s create a file and commit it."</a:t>
-            </a:r>
-          </a:p>
-          <a:p>
-            <a:endParaRPr lang="en-PH" dirty="0"/>
-          </a:p>
-          <a:p>
-            <a:pPr marL="0" marR="0" lvl="0" indent="0" algn="l" defTabSz="914400" rtl="0" eaLnBrk="1" fontAlgn="auto" latinLnBrk="0" hangingPunct="1">
-              <a:lnSpc>
-                <a:spcPct val="100000"/>
-              </a:lnSpc>
-              <a:spcBef>
-                <a:spcPts val="0"/>
-              </a:spcBef>
-              <a:spcAft>
-                <a:spcPts val="0"/>
-              </a:spcAft>
-              <a:buClrTx/>
-              <a:buSzTx/>
-              <a:buFontTx/>
-              <a:buNone/>
-              <a:tabLst/>
-              <a:defRPr/>
-            </a:pPr>
-            <a:r>
-              <a:rPr lang="en-US" dirty="0"/>
-              <a:t>echo creates a file. git add stages it. git commit saves it locally with a message.</a:t>
-            </a:r>
-          </a:p>
-          <a:p>
             <a:endParaRPr lang="en-PH" dirty="0"/>
           </a:p>
         </p:txBody>
@@ -2047,55 +1560,6 @@
           <a:bodyPr/>
           <a:lstStyle/>
           <a:p>
-            <a:pPr marL="0" marR="0" lvl="0" indent="0" algn="l" defTabSz="914400" rtl="0" eaLnBrk="1" fontAlgn="auto" latinLnBrk="0" hangingPunct="1">
-              <a:lnSpc>
-                <a:spcPct val="100000"/>
-              </a:lnSpc>
-              <a:spcBef>
-                <a:spcPts val="0"/>
-              </a:spcBef>
-              <a:spcAft>
-                <a:spcPts val="0"/>
-              </a:spcAft>
-              <a:buClrTx/>
-              <a:buSzTx/>
-              <a:buFontTx/>
-              <a:buNone/>
-              <a:tabLst/>
-              <a:defRPr/>
-            </a:pPr>
-            <a:r>
-              <a:rPr lang="en-US" dirty="0"/>
-              <a:t>To share your work, push it to GitHub.</a:t>
-            </a:r>
-          </a:p>
-          <a:p>
-            <a:endParaRPr lang="en-PH" dirty="0"/>
-          </a:p>
-          <a:p>
-            <a:pPr marL="0" marR="0" lvl="0" indent="0" algn="l" defTabSz="914400" rtl="0" eaLnBrk="1" fontAlgn="auto" latinLnBrk="0" hangingPunct="1">
-              <a:lnSpc>
-                <a:spcPct val="100000"/>
-              </a:lnSpc>
-              <a:spcBef>
-                <a:spcPts val="0"/>
-              </a:spcBef>
-              <a:spcAft>
-                <a:spcPts val="0"/>
-              </a:spcAft>
-              <a:buClrTx/>
-              <a:buSzTx/>
-              <a:buFontTx/>
-              <a:buNone/>
-              <a:tabLst/>
-              <a:defRPr/>
-            </a:pPr>
-            <a:r>
-              <a:rPr lang="en-US" dirty="0"/>
-              <a:t>This uploads your local changes to the remote repo on the main branch.</a:t>
-            </a:r>
-          </a:p>
-          <a:p>
             <a:endParaRPr lang="en-PH" dirty="0"/>
           </a:p>
         </p:txBody>
@@ -2180,55 +1644,6 @@
           <a:bodyPr/>
           <a:lstStyle/>
           <a:p>
-            <a:pPr marL="0" marR="0" lvl="0" indent="0" algn="l" defTabSz="914400" rtl="0" eaLnBrk="1" fontAlgn="auto" latinLnBrk="0" hangingPunct="1">
-              <a:lnSpc>
-                <a:spcPct val="100000"/>
-              </a:lnSpc>
-              <a:spcBef>
-                <a:spcPts val="0"/>
-              </a:spcBef>
-              <a:spcAft>
-                <a:spcPts val="0"/>
-              </a:spcAft>
-              <a:buClrTx/>
-              <a:buSzTx/>
-              <a:buFontTx/>
-              <a:buNone/>
-              <a:tabLst/>
-              <a:defRPr/>
-            </a:pPr>
-            <a:r>
-              <a:rPr lang="en-US" dirty="0"/>
-              <a:t>If teammates made changes, always pull before pushing</a:t>
-            </a:r>
-          </a:p>
-          <a:p>
-            <a:endParaRPr lang="en-PH" dirty="0"/>
-          </a:p>
-          <a:p>
-            <a:pPr marL="0" marR="0" lvl="0" indent="0" algn="l" defTabSz="914400" rtl="0" eaLnBrk="1" fontAlgn="auto" latinLnBrk="0" hangingPunct="1">
-              <a:lnSpc>
-                <a:spcPct val="100000"/>
-              </a:lnSpc>
-              <a:spcBef>
-                <a:spcPts val="0"/>
-              </a:spcBef>
-              <a:spcAft>
-                <a:spcPts val="0"/>
-              </a:spcAft>
-              <a:buClrTx/>
-              <a:buSzTx/>
-              <a:buFontTx/>
-              <a:buNone/>
-              <a:tabLst/>
-              <a:defRPr/>
-            </a:pPr>
-            <a:r>
-              <a:rPr lang="en-US" dirty="0"/>
-              <a:t>Downloads and merges changes from GitHub.</a:t>
-            </a:r>
-          </a:p>
-          <a:p>
             <a:endParaRPr lang="en-PH" dirty="0"/>
           </a:p>
         </p:txBody>
@@ -2313,126 +1728,6 @@
           <a:bodyPr/>
           <a:lstStyle/>
           <a:p>
-            <a:pPr marL="0" marR="0" lvl="0" indent="0" algn="l" defTabSz="914400" rtl="0" eaLnBrk="1" fontAlgn="auto" latinLnBrk="0" hangingPunct="1">
-              <a:lnSpc>
-                <a:spcPct val="100000"/>
-              </a:lnSpc>
-              <a:spcBef>
-                <a:spcPts val="0"/>
-              </a:spcBef>
-              <a:spcAft>
-                <a:spcPts val="0"/>
-              </a:spcAft>
-              <a:buClrTx/>
-              <a:buSzTx/>
-              <a:buFontTx/>
-              <a:buNone/>
-              <a:tabLst/>
-              <a:defRPr/>
-            </a:pPr>
-            <a:r>
-              <a:rPr lang="en-US" dirty="0"/>
-              <a:t>Branches let us experiment safely without touching main.</a:t>
-            </a:r>
-          </a:p>
-          <a:p>
-            <a:endParaRPr lang="en-PH" dirty="0"/>
-          </a:p>
-          <a:p>
-            <a:pPr marL="0" marR="0" lvl="0" indent="0" algn="l" defTabSz="914400" rtl="0" eaLnBrk="1" fontAlgn="auto" latinLnBrk="0" hangingPunct="1">
-              <a:lnSpc>
-                <a:spcPct val="100000"/>
-              </a:lnSpc>
-              <a:spcBef>
-                <a:spcPts val="0"/>
-              </a:spcBef>
-              <a:spcAft>
-                <a:spcPts val="0"/>
-              </a:spcAft>
-              <a:buClrTx/>
-              <a:buSzTx/>
-              <a:buFontTx/>
-              <a:buNone/>
-              <a:tabLst/>
-              <a:defRPr/>
-            </a:pPr>
-            <a:r>
-              <a:rPr lang="en-US" b="1" dirty="0"/>
-              <a:t>Explanation:</a:t>
-            </a:r>
-            <a:r>
-              <a:rPr lang="en-US" dirty="0"/>
-              <a:t> Creates a new branch and switches to it.</a:t>
-            </a:r>
-          </a:p>
-          <a:p>
-            <a:pPr marL="0" marR="0" lvl="0" indent="0" algn="l" defTabSz="914400" rtl="0" eaLnBrk="1" fontAlgn="auto" latinLnBrk="0" hangingPunct="1">
-              <a:lnSpc>
-                <a:spcPct val="100000"/>
-              </a:lnSpc>
-              <a:spcBef>
-                <a:spcPts val="0"/>
-              </a:spcBef>
-              <a:spcAft>
-                <a:spcPts val="0"/>
-              </a:spcAft>
-              <a:buClrTx/>
-              <a:buSzTx/>
-              <a:buFontTx/>
-              <a:buNone/>
-              <a:tabLst/>
-              <a:defRPr/>
-            </a:pPr>
-            <a:endParaRPr lang="en-US" dirty="0"/>
-          </a:p>
-          <a:p>
-            <a:pPr marL="0" marR="0" lvl="0" indent="0" algn="l" defTabSz="914400" rtl="0" eaLnBrk="1" fontAlgn="auto" latinLnBrk="0" hangingPunct="1">
-              <a:lnSpc>
-                <a:spcPct val="100000"/>
-              </a:lnSpc>
-              <a:spcBef>
-                <a:spcPts val="0"/>
-              </a:spcBef>
-              <a:spcAft>
-                <a:spcPts val="0"/>
-              </a:spcAft>
-              <a:buClrTx/>
-              <a:buSzTx/>
-              <a:buFontTx/>
-              <a:buNone/>
-              <a:tabLst/>
-              <a:defRPr/>
-            </a:pPr>
-            <a:r>
-              <a:rPr lang="en-US" b="1" dirty="0"/>
-              <a:t>Explanation:</a:t>
-            </a:r>
-            <a:r>
-              <a:rPr lang="en-US" dirty="0"/>
-              <a:t> -a stages modified tracked files. -m adds a message. -u sets tracking so future git push is simpler.</a:t>
-            </a:r>
-          </a:p>
-          <a:p>
-            <a:pPr marL="0" marR="0" lvl="0" indent="0" algn="l" defTabSz="914400" rtl="0" eaLnBrk="1" fontAlgn="auto" latinLnBrk="0" hangingPunct="1">
-              <a:lnSpc>
-                <a:spcPct val="100000"/>
-              </a:lnSpc>
-              <a:spcBef>
-                <a:spcPts val="0"/>
-              </a:spcBef>
-              <a:spcAft>
-                <a:spcPts val="0"/>
-              </a:spcAft>
-              <a:buClrTx/>
-              <a:buSzTx/>
-              <a:buFontTx/>
-              <a:buNone/>
-              <a:tabLst/>
-              <a:defRPr/>
-            </a:pPr>
-            <a:endParaRPr lang="en-US" dirty="0"/>
-          </a:p>
-          <a:p>
             <a:endParaRPr lang="en-PH" dirty="0"/>
           </a:p>
         </p:txBody>
@@ -2516,29 +1811,6 @@
         <p:txBody>
           <a:bodyPr/>
           <a:lstStyle/>
-          <a:p>
-            <a:pPr marL="0" marR="0" lvl="0" indent="0" algn="l" defTabSz="914400" rtl="0" eaLnBrk="1" fontAlgn="auto" latinLnBrk="0" hangingPunct="1">
-              <a:lnSpc>
-                <a:spcPct val="100000"/>
-              </a:lnSpc>
-              <a:spcBef>
-                <a:spcPts val="0"/>
-              </a:spcBef>
-              <a:spcAft>
-                <a:spcPts val="0"/>
-              </a:spcAft>
-              <a:buClrTx/>
-              <a:buSzTx/>
-              <a:buFontTx/>
-              <a:buNone/>
-              <a:tabLst/>
-              <a:defRPr/>
-            </a:pPr>
-            <a:r>
-              <a:rPr lang="en-US" dirty="0"/>
-              <a:t>Once reviewed, merge your branch into main</a:t>
-            </a:r>
-          </a:p>
           <a:p>
             <a:endParaRPr lang="en-PH" dirty="0"/>
           </a:p>

--- a/gitStarted/notes/Git_Tutorial_Banking_Remediation.pptx
+++ b/gitStarted/notes/Git_Tutorial_Banking_Remediation.pptx
@@ -535,37 +535,6 @@
           <a:bodyPr/>
           <a:lstStyle/>
           <a:p>
-            <a:pPr marL="0" marR="0" lvl="0" indent="0" algn="l" defTabSz="914400" rtl="0" eaLnBrk="1" fontAlgn="auto" latinLnBrk="0" hangingPunct="1">
-              <a:lnSpc>
-                <a:spcPct val="100000"/>
-              </a:lnSpc>
-              <a:spcBef>
-                <a:spcPts val="0"/>
-              </a:spcBef>
-              <a:spcAft>
-                <a:spcPts val="0"/>
-              </a:spcAft>
-              <a:buClrTx/>
-              <a:buSzTx/>
-              <a:buFontTx/>
-              <a:buNone/>
-              <a:tabLst/>
-              <a:defRPr/>
-            </a:pPr>
-            <a:r>
-              <a:rPr lang="en-US" dirty="0"/>
-              <a:t>Welcome everyone! Today we’re diving into Git, a tool that helps us track changes, collaborate with others, and ensure traceability in our work. This session is tailored for business analysts working in banking remediation, with tools you're familiar with: </a:t>
-            </a:r>
-            <a:r>
-              <a:rPr lang="en-US" dirty="0" err="1"/>
-              <a:t>VSCode</a:t>
-            </a:r>
-            <a:r>
-              <a:rPr lang="en-US" dirty="0"/>
-              <a:t> and the command line.</a:t>
-            </a:r>
-          </a:p>
-          <a:p>
             <a:endParaRPr lang="en-PH" dirty="0"/>
           </a:p>
         </p:txBody>
@@ -650,51 +619,6 @@
           <a:bodyPr/>
           <a:lstStyle/>
           <a:p>
-            <a:pPr>
-              <a:buNone/>
-            </a:pPr>
-            <a:r>
-              <a:rPr lang="en-US" dirty="0"/>
-              <a:t>Accidentally added something? Reset or restore it."</a:t>
-            </a:r>
-          </a:p>
-          <a:p>
-            <a:r>
-              <a:rPr lang="en-US" dirty="0"/>
-              <a:t>git restore filename # or git reset --soft HEAD~1</a:t>
-            </a:r>
-          </a:p>
-          <a:p>
-            <a:endParaRPr lang="en-PH" dirty="0"/>
-          </a:p>
-          <a:p>
-            <a:pPr marL="0" marR="0" lvl="0" indent="0" algn="l" defTabSz="914400" rtl="0" eaLnBrk="1" fontAlgn="auto" latinLnBrk="0" hangingPunct="1">
-              <a:lnSpc>
-                <a:spcPct val="100000"/>
-              </a:lnSpc>
-              <a:spcBef>
-                <a:spcPts val="0"/>
-              </a:spcBef>
-              <a:spcAft>
-                <a:spcPts val="0"/>
-              </a:spcAft>
-              <a:buClrTx/>
-              <a:buSzTx/>
-              <a:buFontTx/>
-              <a:buNone/>
-              <a:tabLst/>
-              <a:defRPr/>
-            </a:pPr>
-            <a:r>
-              <a:rPr lang="en-US" b="1" dirty="0"/>
-              <a:t>Explanation:</a:t>
-            </a:r>
-            <a:r>
-              <a:rPr lang="en-US" dirty="0"/>
-              <a:t> Restore reverts file changes. Reset undoes the last commit.</a:t>
-            </a:r>
-          </a:p>
-          <a:p>
             <a:endParaRPr lang="en-PH" dirty="0"/>
           </a:p>
         </p:txBody>
@@ -796,76 +720,6 @@
               <a:tabLst/>
               <a:defRPr/>
             </a:pPr>
-            <a:r>
-              <a:rPr lang="en-US" dirty="0"/>
-              <a:t>Want to see what changed and when?</a:t>
-            </a:r>
-          </a:p>
-          <a:p>
-            <a:pPr marL="0" marR="0" lvl="0" indent="0" algn="l" defTabSz="914400" rtl="0" eaLnBrk="1" fontAlgn="auto" latinLnBrk="0" hangingPunct="1">
-              <a:lnSpc>
-                <a:spcPct val="100000"/>
-              </a:lnSpc>
-              <a:spcBef>
-                <a:spcPts val="0"/>
-              </a:spcBef>
-              <a:spcAft>
-                <a:spcPts val="0"/>
-              </a:spcAft>
-              <a:buClrTx/>
-              <a:buSzTx/>
-              <a:buFontTx/>
-              <a:buNone/>
-              <a:tabLst/>
-              <a:defRPr/>
-            </a:pPr>
-            <a:endParaRPr lang="en-US" dirty="0"/>
-          </a:p>
-          <a:p>
-            <a:pPr marL="0" marR="0" lvl="0" indent="0" algn="l" defTabSz="914400" rtl="0" eaLnBrk="1" fontAlgn="auto" latinLnBrk="0" hangingPunct="1">
-              <a:lnSpc>
-                <a:spcPct val="100000"/>
-              </a:lnSpc>
-              <a:spcBef>
-                <a:spcPts val="0"/>
-              </a:spcBef>
-              <a:spcAft>
-                <a:spcPts val="0"/>
-              </a:spcAft>
-              <a:buClrTx/>
-              <a:buSzTx/>
-              <a:buFontTx/>
-              <a:buNone/>
-              <a:tabLst/>
-              <a:defRPr/>
-            </a:pPr>
-            <a:r>
-              <a:rPr lang="en-US" b="1" dirty="0"/>
-              <a:t>Explanation:</a:t>
-            </a:r>
-            <a:r>
-              <a:rPr lang="en-US" dirty="0"/>
-              <a:t> Shows the commit history.</a:t>
-            </a:r>
-          </a:p>
-          <a:p>
-            <a:pPr marL="0" marR="0" lvl="0" indent="0" algn="l" defTabSz="914400" rtl="0" eaLnBrk="1" fontAlgn="auto" latinLnBrk="0" hangingPunct="1">
-              <a:lnSpc>
-                <a:spcPct val="100000"/>
-              </a:lnSpc>
-              <a:spcBef>
-                <a:spcPts val="0"/>
-              </a:spcBef>
-              <a:spcAft>
-                <a:spcPts val="0"/>
-              </a:spcAft>
-              <a:buClrTx/>
-              <a:buSzTx/>
-              <a:buFontTx/>
-              <a:buNone/>
-              <a:tabLst/>
-              <a:defRPr/>
-            </a:pPr>
             <a:endParaRPr lang="en-US" dirty="0"/>
           </a:p>
         </p:txBody>
@@ -1118,67 +972,6 @@
           <a:bodyPr/>
           <a:lstStyle/>
           <a:p>
-            <a:pPr>
-              <a:buFont typeface="Arial" panose="020B0604020202020204" pitchFamily="34" charset="0"/>
-              <a:buChar char="•"/>
-            </a:pPr>
-            <a:r>
-              <a:rPr lang="en-US" b="1" dirty="0"/>
-              <a:t>How to check branches?</a:t>
-            </a:r>
-            <a:r>
-              <a:rPr lang="en-US" dirty="0"/>
-              <a:t> git branch, git branch -r, git branch -a</a:t>
-            </a:r>
-          </a:p>
-          <a:p>
-            <a:pPr>
-              <a:buFont typeface="Arial" panose="020B0604020202020204" pitchFamily="34" charset="0"/>
-              <a:buChar char="•"/>
-            </a:pPr>
-            <a:r>
-              <a:rPr lang="en-US" b="1" dirty="0"/>
-              <a:t>What is amend?</a:t>
-            </a:r>
-            <a:r>
-              <a:rPr lang="en-US" dirty="0"/>
-              <a:t> git commit --amend lets you fix the last commit.</a:t>
-            </a:r>
-          </a:p>
-          <a:p>
-            <a:pPr>
-              <a:buFont typeface="Arial" panose="020B0604020202020204" pitchFamily="34" charset="0"/>
-              <a:buChar char="•"/>
-            </a:pPr>
-            <a:r>
-              <a:rPr lang="en-US" b="1" dirty="0"/>
-              <a:t>What’s .</a:t>
-            </a:r>
-            <a:r>
-              <a:rPr lang="en-US" b="1" dirty="0" err="1"/>
-              <a:t>gitignore</a:t>
-            </a:r>
-            <a:r>
-              <a:rPr lang="en-US" b="1" dirty="0"/>
-              <a:t>?</a:t>
-            </a:r>
-            <a:r>
-              <a:rPr lang="en-US" dirty="0"/>
-              <a:t> File to exclude things like .</a:t>
-            </a:r>
-            <a:r>
-              <a:rPr lang="en-US" dirty="0" err="1"/>
-              <a:t>DS_Store</a:t>
-            </a:r>
-            <a:r>
-              <a:rPr lang="en-US" dirty="0"/>
-              <a:t>, *.log, temp/</a:t>
-            </a:r>
-          </a:p>
-          <a:p>
-            <a:endParaRPr lang="en-PH" dirty="0"/>
-          </a:p>
-          <a:p>
             <a:endParaRPr lang="en-PH" dirty="0"/>
           </a:p>
         </p:txBody>
@@ -1263,28 +1056,89 @@
           <a:bodyPr/>
           <a:lstStyle/>
           <a:p>
-            <a:pPr marL="0" marR="0" lvl="0" indent="0" algn="l" defTabSz="914400" rtl="0" eaLnBrk="1" fontAlgn="auto" latinLnBrk="0" hangingPunct="1">
-              <a:lnSpc>
-                <a:spcPct val="100000"/>
-              </a:lnSpc>
-              <a:spcBef>
-                <a:spcPts val="0"/>
-              </a:spcBef>
-              <a:spcAft>
-                <a:spcPts val="0"/>
-              </a:spcAft>
-              <a:buClrTx/>
-              <a:buSzTx/>
-              <a:buFontTx/>
-              <a:buNone/>
-              <a:tabLst/>
-              <a:defRPr/>
-            </a:pPr>
-            <a:r>
-              <a:rPr lang="en-US" dirty="0"/>
-              <a:t>To recap: you clone, create or edit files, commit locally, and push to GitHub. You work in branches to stay safe. Always pull before pushing, and use clear messages."</a:t>
-            </a:r>
-          </a:p>
+            <a:endParaRPr lang="en-PH" dirty="0"/>
+          </a:p>
+        </p:txBody>
+      </p:sp>
+      <p:sp>
+        <p:nvSpPr>
+          <p:cNvPr id="4" name="Slide Number Placeholder 3"/>
+          <p:cNvSpPr>
+            <a:spLocks noGrp="1"/>
+          </p:cNvSpPr>
+          <p:nvPr>
+            <p:ph type="sldNum" sz="quarter" idx="5"/>
+          </p:nvPr>
+        </p:nvSpPr>
+        <p:spPr/>
+        <p:txBody>
+          <a:bodyPr/>
+          <a:lstStyle/>
+          <a:p>
+            <a:fld id="{AA6290D1-6140-49A7-820A-52936A3EF0C8}" type="slidenum">
+              <a:rPr lang="en-PH" smtClean="0"/>
+              <a:t>15</a:t>
+            </a:fld>
+            <a:endParaRPr lang="en-PH"/>
+          </a:p>
+        </p:txBody>
+      </p:sp>
+    </p:spTree>
+    <p:extLst>
+      <p:ext uri="{BB962C8B-B14F-4D97-AF65-F5344CB8AC3E}">
+        <p14:creationId xmlns:p14="http://schemas.microsoft.com/office/powerpoint/2010/main" val="1032149547"/>
+      </p:ext>
+    </p:extLst>
+  </p:cSld>
+  <p:clrMapOvr>
+    <a:masterClrMapping/>
+  </p:clrMapOvr>
+</p:notes>
+</file>
+
+<file path=ppt/notesSlides/notesSlide16.xml><?xml version="1.0" encoding="utf-8"?>
+<p:notes xmlns:a="http://schemas.openxmlformats.org/drawingml/2006/main" xmlns:r="http://schemas.openxmlformats.org/officeDocument/2006/relationships" xmlns:p="http://schemas.openxmlformats.org/presentationml/2006/main">
+  <p:cSld>
+    <p:spTree>
+      <p:nvGrpSpPr>
+        <p:cNvPr id="1" name=""/>
+        <p:cNvGrpSpPr/>
+        <p:nvPr/>
+      </p:nvGrpSpPr>
+      <p:grpSpPr>
+        <a:xfrm>
+          <a:off x="0" y="0"/>
+          <a:ext cx="0" cy="0"/>
+          <a:chOff x="0" y="0"/>
+          <a:chExt cx="0" cy="0"/>
+        </a:xfrm>
+      </p:grpSpPr>
+      <p:sp>
+        <p:nvSpPr>
+          <p:cNvPr id="2" name="Slide Image Placeholder 1"/>
+          <p:cNvSpPr>
+            <a:spLocks noGrp="1" noRot="1" noChangeAspect="1"/>
+          </p:cNvSpPr>
+          <p:nvPr>
+            <p:ph type="sldImg"/>
+          </p:nvPr>
+        </p:nvSpPr>
+        <p:spPr/>
+      </p:sp>
+      <p:sp>
+        <p:nvSpPr>
+          <p:cNvPr id="3" name="Notes Placeholder 2"/>
+          <p:cNvSpPr>
+            <a:spLocks noGrp="1"/>
+          </p:cNvSpPr>
+          <p:nvPr>
+            <p:ph type="body" idx="1"/>
+          </p:nvPr>
+        </p:nvSpPr>
+        <p:spPr/>
+        <p:txBody>
+          <a:bodyPr/>
+          <a:lstStyle/>
           <a:p>
             <a:endParaRPr lang="en-PH" dirty="0"/>
           </a:p>
@@ -1370,226 +1224,6 @@
           <a:bodyPr/>
           <a:lstStyle/>
           <a:p>
-            <a:pPr marL="0" marR="0" lvl="0" indent="0" algn="l" defTabSz="914400" rtl="0" eaLnBrk="1" fontAlgn="auto" latinLnBrk="0" hangingPunct="1">
-              <a:lnSpc>
-                <a:spcPct val="100000"/>
-              </a:lnSpc>
-              <a:spcBef>
-                <a:spcPts val="0"/>
-              </a:spcBef>
-              <a:spcAft>
-                <a:spcPts val="0"/>
-              </a:spcAft>
-              <a:buClrTx/>
-              <a:buSzTx/>
-              <a:buFontTx/>
-              <a:buNone/>
-              <a:tabLst/>
-              <a:defRPr/>
-            </a:pPr>
-            <a:r>
-              <a:rPr lang="en-US" dirty="0"/>
-              <a:t>Let’s start with why we use Git. Git helps track the versions of your SQL scripts, documentation, Excel-based findings—even if you're not writing code. It helps in understanding what changed, when, and by whom. In remediation work, audit trails are essential. Git gives you that, and more.</a:t>
-            </a:r>
-          </a:p>
-          <a:p>
-            <a:endParaRPr lang="en-PH" dirty="0"/>
-          </a:p>
-          <a:p>
-            <a:pPr>
-              <a:buNone/>
-            </a:pPr>
-            <a:r>
-              <a:rPr lang="en-US" b="1" dirty="0"/>
-              <a:t>Git is Like a “Version-Controlled Filing Cabinet”</a:t>
-            </a:r>
-          </a:p>
-          <a:p>
-            <a:pPr>
-              <a:buNone/>
-            </a:pPr>
-            <a:r>
-              <a:rPr lang="en-US" b="1" dirty="0"/>
-              <a:t>Imagine your remediation project is a shared filing cabinet.</a:t>
-            </a:r>
-            <a:endParaRPr lang="en-US" dirty="0"/>
-          </a:p>
-          <a:p>
-            <a:pPr>
-              <a:buFont typeface="Arial" panose="020B0604020202020204" pitchFamily="34" charset="0"/>
-              <a:buChar char="•"/>
-            </a:pPr>
-            <a:r>
-              <a:rPr lang="en-US" dirty="0"/>
-              <a:t>Every analyst works on reports (documents, SQL scripts, spreadsheets).</a:t>
-            </a:r>
-          </a:p>
-          <a:p>
-            <a:pPr>
-              <a:buFont typeface="Arial" panose="020B0604020202020204" pitchFamily="34" charset="0"/>
-              <a:buChar char="•"/>
-            </a:pPr>
-            <a:r>
-              <a:rPr lang="en-US" dirty="0"/>
-              <a:t>Without Git, people overwrite each other's files or keep 10 versions like:</a:t>
-            </a:r>
-          </a:p>
-          <a:p>
-            <a:pPr>
-              <a:buFont typeface="Arial" panose="020B0604020202020204" pitchFamily="34" charset="0"/>
-              <a:buChar char="•"/>
-            </a:pPr>
-            <a:r>
-              <a:rPr lang="en-US" dirty="0" err="1"/>
-              <a:t>CopyEdit</a:t>
-            </a:r>
-            <a:endParaRPr lang="en-US" dirty="0"/>
-          </a:p>
-          <a:p>
-            <a:pPr rtl="0">
-              <a:buFont typeface="Arial" panose="020B0604020202020204" pitchFamily="34" charset="0"/>
-              <a:buChar char="•"/>
-            </a:pPr>
-            <a:r>
-              <a:rPr lang="en-US" dirty="0"/>
-              <a:t>final_report_v2_final_FINAL_reviewed_UPDATED.docx </a:t>
-            </a:r>
-          </a:p>
-          <a:p>
-            <a:pPr>
-              <a:buNone/>
-            </a:pPr>
-            <a:r>
-              <a:rPr lang="en-US" b="1" dirty="0"/>
-              <a:t>🔄 Now enter Git — your smart filing system:</a:t>
-            </a:r>
-          </a:p>
-          <a:p>
-            <a:pPr>
-              <a:buFont typeface="Arial" panose="020B0604020202020204" pitchFamily="34" charset="0"/>
-              <a:buChar char="•"/>
-            </a:pPr>
-            <a:r>
-              <a:rPr lang="en-US" dirty="0"/>
-              <a:t>Every time you update a file, Git remembers exactly </a:t>
-            </a:r>
-            <a:r>
-              <a:rPr lang="en-US" b="1" dirty="0"/>
-              <a:t>what changed</a:t>
-            </a:r>
-            <a:r>
-              <a:rPr lang="en-US" dirty="0"/>
-              <a:t>, </a:t>
-            </a:r>
-            <a:r>
-              <a:rPr lang="en-US" b="1" dirty="0"/>
-              <a:t>who changed it</a:t>
-            </a:r>
-            <a:r>
-              <a:rPr lang="en-US" dirty="0"/>
-              <a:t>, and </a:t>
-            </a:r>
-            <a:r>
-              <a:rPr lang="en-US" b="1" dirty="0"/>
-              <a:t>when</a:t>
-            </a:r>
-            <a:r>
-              <a:rPr lang="en-US" dirty="0"/>
-              <a:t>.</a:t>
-            </a:r>
-          </a:p>
-          <a:p>
-            <a:pPr>
-              <a:buFont typeface="Arial" panose="020B0604020202020204" pitchFamily="34" charset="0"/>
-              <a:buChar char="•"/>
-            </a:pPr>
-            <a:r>
-              <a:rPr lang="en-US" dirty="0"/>
-              <a:t>You can </a:t>
-            </a:r>
-            <a:r>
-              <a:rPr lang="en-US" b="1" dirty="0"/>
-              <a:t>roll back</a:t>
-            </a:r>
-            <a:r>
-              <a:rPr lang="en-US" dirty="0"/>
-              <a:t> to earlier versions if someone makes a mistake.</a:t>
-            </a:r>
-          </a:p>
-          <a:p>
-            <a:pPr>
-              <a:buFont typeface="Arial" panose="020B0604020202020204" pitchFamily="34" charset="0"/>
-              <a:buChar char="•"/>
-            </a:pPr>
-            <a:r>
-              <a:rPr lang="en-US" dirty="0"/>
-              <a:t>You can </a:t>
-            </a:r>
-            <a:r>
-              <a:rPr lang="en-US" b="1" dirty="0"/>
-              <a:t>branch off</a:t>
-            </a:r>
-            <a:r>
-              <a:rPr lang="en-US" dirty="0"/>
-              <a:t> and work on new ideas (like testing new risk logic) without disturbing the main project.</a:t>
-            </a:r>
-          </a:p>
-          <a:p>
-            <a:pPr>
-              <a:buFont typeface="Arial" panose="020B0604020202020204" pitchFamily="34" charset="0"/>
-              <a:buChar char="•"/>
-            </a:pPr>
-            <a:r>
-              <a:rPr lang="en-US" dirty="0"/>
-              <a:t>You can </a:t>
-            </a:r>
-            <a:r>
-              <a:rPr lang="en-US" b="1" dirty="0"/>
-              <a:t>merge changes</a:t>
-            </a:r>
-            <a:r>
-              <a:rPr lang="en-US" dirty="0"/>
-              <a:t> only after review and agreement — like controlled approvals.</a:t>
-            </a:r>
-          </a:p>
-          <a:p>
-            <a:pPr>
-              <a:buNone/>
-            </a:pPr>
-            <a:r>
-              <a:rPr lang="en-US" b="1" dirty="0"/>
-              <a:t>📤 GitHub is like the cloud filing cabinet:</a:t>
-            </a:r>
-          </a:p>
-          <a:p>
-            <a:pPr>
-              <a:buFont typeface="Arial" panose="020B0604020202020204" pitchFamily="34" charset="0"/>
-              <a:buChar char="•"/>
-            </a:pPr>
-            <a:r>
-              <a:rPr lang="en-US" dirty="0"/>
-              <a:t>Everyone syncs their local changes back to a </a:t>
-            </a:r>
-            <a:r>
-              <a:rPr lang="en-US" b="1" dirty="0"/>
-              <a:t>shared remote folder</a:t>
-            </a:r>
-            <a:r>
-              <a:rPr lang="en-US" dirty="0"/>
-              <a:t> (the GitHub repo).</a:t>
-            </a:r>
-          </a:p>
-          <a:p>
-            <a:pPr>
-              <a:buFont typeface="Arial" panose="020B0604020202020204" pitchFamily="34" charset="0"/>
-              <a:buChar char="•"/>
-            </a:pPr>
-            <a:r>
-              <a:rPr lang="en-US" dirty="0"/>
-              <a:t>It ensures the team is always working with the latest reviewed version.</a:t>
-            </a:r>
-          </a:p>
-          <a:p>
             <a:endParaRPr lang="en-PH" dirty="0"/>
           </a:p>
         </p:txBody>
@@ -1674,55 +1308,6 @@
           <a:bodyPr/>
           <a:lstStyle/>
           <a:p>
-            <a:pPr marL="0" marR="0" lvl="0" indent="0" algn="l" defTabSz="914400" rtl="0" eaLnBrk="1" fontAlgn="auto" latinLnBrk="0" hangingPunct="1">
-              <a:lnSpc>
-                <a:spcPct val="100000"/>
-              </a:lnSpc>
-              <a:spcBef>
-                <a:spcPts val="0"/>
-              </a:spcBef>
-              <a:spcAft>
-                <a:spcPts val="0"/>
-              </a:spcAft>
-              <a:buClrTx/>
-              <a:buSzTx/>
-              <a:buFontTx/>
-              <a:buNone/>
-              <a:tabLst/>
-              <a:defRPr/>
-            </a:pPr>
-            <a:r>
-              <a:rPr lang="en-US" dirty="0"/>
-              <a:t>"Instead of creating files from scratch, we clone an existing project from GitHub. This gives us the full working directory locally."</a:t>
-            </a:r>
-          </a:p>
-          <a:p>
-            <a:endParaRPr lang="en-PH" dirty="0"/>
-          </a:p>
-          <a:p>
-            <a:pPr marL="0" marR="0" lvl="0" indent="0" algn="l" defTabSz="914400" rtl="0" eaLnBrk="1" fontAlgn="auto" latinLnBrk="0" hangingPunct="1">
-              <a:lnSpc>
-                <a:spcPct val="100000"/>
-              </a:lnSpc>
-              <a:spcBef>
-                <a:spcPts val="0"/>
-              </a:spcBef>
-              <a:spcAft>
-                <a:spcPts val="0"/>
-              </a:spcAft>
-              <a:buClrTx/>
-              <a:buSzTx/>
-              <a:buFontTx/>
-              <a:buNone/>
-              <a:tabLst/>
-              <a:defRPr/>
-            </a:pPr>
-            <a:r>
-              <a:rPr lang="en-US" dirty="0"/>
-              <a:t>git clone downloads a remote repo; cd moves into that folder.</a:t>
-            </a:r>
-          </a:p>
-          <a:p>
             <a:endParaRPr lang="en-PH" dirty="0"/>
           </a:p>
         </p:txBody>
@@ -1807,29 +1392,6 @@
           <a:bodyPr/>
           <a:lstStyle/>
           <a:p>
-            <a:pPr marL="0" marR="0" lvl="0" indent="0" algn="l" defTabSz="914400" rtl="0" eaLnBrk="1" fontAlgn="auto" latinLnBrk="0" hangingPunct="1">
-              <a:lnSpc>
-                <a:spcPct val="100000"/>
-              </a:lnSpc>
-              <a:spcBef>
-                <a:spcPts val="0"/>
-              </a:spcBef>
-              <a:spcAft>
-                <a:spcPts val="0"/>
-              </a:spcAft>
-              <a:buClrTx/>
-              <a:buSzTx/>
-              <a:buFontTx/>
-              <a:buNone/>
-              <a:tabLst/>
-              <a:defRPr/>
-            </a:pPr>
-            <a:r>
-              <a:rPr lang="en-US" dirty="0"/>
-              <a:t>Think of Git in two layers. Local is your workspace—where you make changes and commits. Remote (GitHub) is where you sync those changes with your team. Git lets you work offline, then push when ready.</a:t>
-            </a:r>
-          </a:p>
-          <a:p>
             <a:endParaRPr lang="en-PH" dirty="0"/>
           </a:p>
         </p:txBody>
@@ -1914,55 +1476,6 @@
           <a:bodyPr/>
           <a:lstStyle/>
           <a:p>
-            <a:pPr marL="0" marR="0" lvl="0" indent="0" algn="l" defTabSz="914400" rtl="0" eaLnBrk="1" fontAlgn="auto" latinLnBrk="0" hangingPunct="1">
-              <a:lnSpc>
-                <a:spcPct val="100000"/>
-              </a:lnSpc>
-              <a:spcBef>
-                <a:spcPts val="0"/>
-              </a:spcBef>
-              <a:spcAft>
-                <a:spcPts val="0"/>
-              </a:spcAft>
-              <a:buClrTx/>
-              <a:buSzTx/>
-              <a:buFontTx/>
-              <a:buNone/>
-              <a:tabLst/>
-              <a:defRPr/>
-            </a:pPr>
-            <a:r>
-              <a:rPr lang="en-US" dirty="0"/>
-              <a:t>"Let’s create a file and commit it."</a:t>
-            </a:r>
-          </a:p>
-          <a:p>
-            <a:endParaRPr lang="en-PH" dirty="0"/>
-          </a:p>
-          <a:p>
-            <a:pPr marL="0" marR="0" lvl="0" indent="0" algn="l" defTabSz="914400" rtl="0" eaLnBrk="1" fontAlgn="auto" latinLnBrk="0" hangingPunct="1">
-              <a:lnSpc>
-                <a:spcPct val="100000"/>
-              </a:lnSpc>
-              <a:spcBef>
-                <a:spcPts val="0"/>
-              </a:spcBef>
-              <a:spcAft>
-                <a:spcPts val="0"/>
-              </a:spcAft>
-              <a:buClrTx/>
-              <a:buSzTx/>
-              <a:buFontTx/>
-              <a:buNone/>
-              <a:tabLst/>
-              <a:defRPr/>
-            </a:pPr>
-            <a:r>
-              <a:rPr lang="en-US" dirty="0"/>
-              <a:t>echo creates a file. git add stages it. git commit saves it locally with a message.</a:t>
-            </a:r>
-          </a:p>
-          <a:p>
             <a:endParaRPr lang="en-PH" dirty="0"/>
           </a:p>
         </p:txBody>
@@ -2047,55 +1560,6 @@
           <a:bodyPr/>
           <a:lstStyle/>
           <a:p>
-            <a:pPr marL="0" marR="0" lvl="0" indent="0" algn="l" defTabSz="914400" rtl="0" eaLnBrk="1" fontAlgn="auto" latinLnBrk="0" hangingPunct="1">
-              <a:lnSpc>
-                <a:spcPct val="100000"/>
-              </a:lnSpc>
-              <a:spcBef>
-                <a:spcPts val="0"/>
-              </a:spcBef>
-              <a:spcAft>
-                <a:spcPts val="0"/>
-              </a:spcAft>
-              <a:buClrTx/>
-              <a:buSzTx/>
-              <a:buFontTx/>
-              <a:buNone/>
-              <a:tabLst/>
-              <a:defRPr/>
-            </a:pPr>
-            <a:r>
-              <a:rPr lang="en-US" dirty="0"/>
-              <a:t>To share your work, push it to GitHub.</a:t>
-            </a:r>
-          </a:p>
-          <a:p>
-            <a:endParaRPr lang="en-PH" dirty="0"/>
-          </a:p>
-          <a:p>
-            <a:pPr marL="0" marR="0" lvl="0" indent="0" algn="l" defTabSz="914400" rtl="0" eaLnBrk="1" fontAlgn="auto" latinLnBrk="0" hangingPunct="1">
-              <a:lnSpc>
-                <a:spcPct val="100000"/>
-              </a:lnSpc>
-              <a:spcBef>
-                <a:spcPts val="0"/>
-              </a:spcBef>
-              <a:spcAft>
-                <a:spcPts val="0"/>
-              </a:spcAft>
-              <a:buClrTx/>
-              <a:buSzTx/>
-              <a:buFontTx/>
-              <a:buNone/>
-              <a:tabLst/>
-              <a:defRPr/>
-            </a:pPr>
-            <a:r>
-              <a:rPr lang="en-US" dirty="0"/>
-              <a:t>This uploads your local changes to the remote repo on the main branch.</a:t>
-            </a:r>
-          </a:p>
-          <a:p>
             <a:endParaRPr lang="en-PH" dirty="0"/>
           </a:p>
         </p:txBody>
@@ -2180,55 +1644,6 @@
           <a:bodyPr/>
           <a:lstStyle/>
           <a:p>
-            <a:pPr marL="0" marR="0" lvl="0" indent="0" algn="l" defTabSz="914400" rtl="0" eaLnBrk="1" fontAlgn="auto" latinLnBrk="0" hangingPunct="1">
-              <a:lnSpc>
-                <a:spcPct val="100000"/>
-              </a:lnSpc>
-              <a:spcBef>
-                <a:spcPts val="0"/>
-              </a:spcBef>
-              <a:spcAft>
-                <a:spcPts val="0"/>
-              </a:spcAft>
-              <a:buClrTx/>
-              <a:buSzTx/>
-              <a:buFontTx/>
-              <a:buNone/>
-              <a:tabLst/>
-              <a:defRPr/>
-            </a:pPr>
-            <a:r>
-              <a:rPr lang="en-US" dirty="0"/>
-              <a:t>If teammates made changes, always pull before pushing</a:t>
-            </a:r>
-          </a:p>
-          <a:p>
-            <a:endParaRPr lang="en-PH" dirty="0"/>
-          </a:p>
-          <a:p>
-            <a:pPr marL="0" marR="0" lvl="0" indent="0" algn="l" defTabSz="914400" rtl="0" eaLnBrk="1" fontAlgn="auto" latinLnBrk="0" hangingPunct="1">
-              <a:lnSpc>
-                <a:spcPct val="100000"/>
-              </a:lnSpc>
-              <a:spcBef>
-                <a:spcPts val="0"/>
-              </a:spcBef>
-              <a:spcAft>
-                <a:spcPts val="0"/>
-              </a:spcAft>
-              <a:buClrTx/>
-              <a:buSzTx/>
-              <a:buFontTx/>
-              <a:buNone/>
-              <a:tabLst/>
-              <a:defRPr/>
-            </a:pPr>
-            <a:r>
-              <a:rPr lang="en-US" dirty="0"/>
-              <a:t>Downloads and merges changes from GitHub.</a:t>
-            </a:r>
-          </a:p>
-          <a:p>
             <a:endParaRPr lang="en-PH" dirty="0"/>
           </a:p>
         </p:txBody>
@@ -2313,126 +1728,6 @@
           <a:bodyPr/>
           <a:lstStyle/>
           <a:p>
-            <a:pPr marL="0" marR="0" lvl="0" indent="0" algn="l" defTabSz="914400" rtl="0" eaLnBrk="1" fontAlgn="auto" latinLnBrk="0" hangingPunct="1">
-              <a:lnSpc>
-                <a:spcPct val="100000"/>
-              </a:lnSpc>
-              <a:spcBef>
-                <a:spcPts val="0"/>
-              </a:spcBef>
-              <a:spcAft>
-                <a:spcPts val="0"/>
-              </a:spcAft>
-              <a:buClrTx/>
-              <a:buSzTx/>
-              <a:buFontTx/>
-              <a:buNone/>
-              <a:tabLst/>
-              <a:defRPr/>
-            </a:pPr>
-            <a:r>
-              <a:rPr lang="en-US" dirty="0"/>
-              <a:t>Branches let us experiment safely without touching main.</a:t>
-            </a:r>
-          </a:p>
-          <a:p>
-            <a:endParaRPr lang="en-PH" dirty="0"/>
-          </a:p>
-          <a:p>
-            <a:pPr marL="0" marR="0" lvl="0" indent="0" algn="l" defTabSz="914400" rtl="0" eaLnBrk="1" fontAlgn="auto" latinLnBrk="0" hangingPunct="1">
-              <a:lnSpc>
-                <a:spcPct val="100000"/>
-              </a:lnSpc>
-              <a:spcBef>
-                <a:spcPts val="0"/>
-              </a:spcBef>
-              <a:spcAft>
-                <a:spcPts val="0"/>
-              </a:spcAft>
-              <a:buClrTx/>
-              <a:buSzTx/>
-              <a:buFontTx/>
-              <a:buNone/>
-              <a:tabLst/>
-              <a:defRPr/>
-            </a:pPr>
-            <a:r>
-              <a:rPr lang="en-US" b="1" dirty="0"/>
-              <a:t>Explanation:</a:t>
-            </a:r>
-            <a:r>
-              <a:rPr lang="en-US" dirty="0"/>
-              <a:t> Creates a new branch and switches to it.</a:t>
-            </a:r>
-          </a:p>
-          <a:p>
-            <a:pPr marL="0" marR="0" lvl="0" indent="0" algn="l" defTabSz="914400" rtl="0" eaLnBrk="1" fontAlgn="auto" latinLnBrk="0" hangingPunct="1">
-              <a:lnSpc>
-                <a:spcPct val="100000"/>
-              </a:lnSpc>
-              <a:spcBef>
-                <a:spcPts val="0"/>
-              </a:spcBef>
-              <a:spcAft>
-                <a:spcPts val="0"/>
-              </a:spcAft>
-              <a:buClrTx/>
-              <a:buSzTx/>
-              <a:buFontTx/>
-              <a:buNone/>
-              <a:tabLst/>
-              <a:defRPr/>
-            </a:pPr>
-            <a:endParaRPr lang="en-US" dirty="0"/>
-          </a:p>
-          <a:p>
-            <a:pPr marL="0" marR="0" lvl="0" indent="0" algn="l" defTabSz="914400" rtl="0" eaLnBrk="1" fontAlgn="auto" latinLnBrk="0" hangingPunct="1">
-              <a:lnSpc>
-                <a:spcPct val="100000"/>
-              </a:lnSpc>
-              <a:spcBef>
-                <a:spcPts val="0"/>
-              </a:spcBef>
-              <a:spcAft>
-                <a:spcPts val="0"/>
-              </a:spcAft>
-              <a:buClrTx/>
-              <a:buSzTx/>
-              <a:buFontTx/>
-              <a:buNone/>
-              <a:tabLst/>
-              <a:defRPr/>
-            </a:pPr>
-            <a:r>
-              <a:rPr lang="en-US" b="1" dirty="0"/>
-              <a:t>Explanation:</a:t>
-            </a:r>
-            <a:r>
-              <a:rPr lang="en-US" dirty="0"/>
-              <a:t> -a stages modified tracked files. -m adds a message. -u sets tracking so future git push is simpler.</a:t>
-            </a:r>
-          </a:p>
-          <a:p>
-            <a:pPr marL="0" marR="0" lvl="0" indent="0" algn="l" defTabSz="914400" rtl="0" eaLnBrk="1" fontAlgn="auto" latinLnBrk="0" hangingPunct="1">
-              <a:lnSpc>
-                <a:spcPct val="100000"/>
-              </a:lnSpc>
-              <a:spcBef>
-                <a:spcPts val="0"/>
-              </a:spcBef>
-              <a:spcAft>
-                <a:spcPts val="0"/>
-              </a:spcAft>
-              <a:buClrTx/>
-              <a:buSzTx/>
-              <a:buFontTx/>
-              <a:buNone/>
-              <a:tabLst/>
-              <a:defRPr/>
-            </a:pPr>
-            <a:endParaRPr lang="en-US" dirty="0"/>
-          </a:p>
-          <a:p>
             <a:endParaRPr lang="en-PH" dirty="0"/>
           </a:p>
         </p:txBody>
@@ -2516,29 +1811,6 @@
         <p:txBody>
           <a:bodyPr/>
           <a:lstStyle/>
-          <a:p>
-            <a:pPr marL="0" marR="0" lvl="0" indent="0" algn="l" defTabSz="914400" rtl="0" eaLnBrk="1" fontAlgn="auto" latinLnBrk="0" hangingPunct="1">
-              <a:lnSpc>
-                <a:spcPct val="100000"/>
-              </a:lnSpc>
-              <a:spcBef>
-                <a:spcPts val="0"/>
-              </a:spcBef>
-              <a:spcAft>
-                <a:spcPts val="0"/>
-              </a:spcAft>
-              <a:buClrTx/>
-              <a:buSzTx/>
-              <a:buFontTx/>
-              <a:buNone/>
-              <a:tabLst/>
-              <a:defRPr/>
-            </a:pPr>
-            <a:r>
-              <a:rPr lang="en-US" dirty="0"/>
-              <a:t>Once reviewed, merge your branch into main</a:t>
-            </a:r>
-          </a:p>
           <a:p>
             <a:endParaRPr lang="en-PH" dirty="0"/>
           </a:p>
